--- a/Software Design/23. Generative AI Design Patterns.pptx
+++ b/Software Design/23. Generative AI Design Patterns.pptx
@@ -5,7 +5,7 @@
     <p:sldMasterId id="2147483708" r:id="rId1"/>
   </p:sldMasterIdLst>
   <p:notesMasterIdLst>
-    <p:notesMasterId r:id="rId10"/>
+    <p:notesMasterId r:id="rId11"/>
   </p:notesMasterIdLst>
   <p:sldIdLst>
     <p:sldId id="256" r:id="rId2"/>
@@ -15,7 +15,8 @@
     <p:sldId id="608" r:id="rId6"/>
     <p:sldId id="650" r:id="rId7"/>
     <p:sldId id="623" r:id="rId8"/>
-    <p:sldId id="343" r:id="rId9"/>
+    <p:sldId id="651" r:id="rId9"/>
+    <p:sldId id="343" r:id="rId10"/>
   </p:sldIdLst>
   <p:sldSz cx="9144000" cy="6858000" type="screen4x3"/>
   <p:notesSz cx="6858000" cy="9144000"/>
@@ -230,7 +231,7 @@
             <a:fld id="{C0912C56-9914-4E1B-8096-3F8D8B76373A}" type="datetimeFigureOut">
               <a:rPr lang="en-US" smtClean="0"/>
               <a:pPr/>
-              <a:t>5/21/2026</a:t>
+              <a:t>7/25/2026</a:t>
             </a:fld>
             <a:endParaRPr lang="en-US"/>
           </a:p>
@@ -687,7 +688,7 @@
               <a:pPr>
                 <a:defRPr/>
               </a:pPr>
-              <a:t>5/21/2026</a:t>
+              <a:t>7/25/2026</a:t>
             </a:fld>
             <a:endParaRPr lang="en-US"/>
           </a:p>
@@ -879,7 +880,7 @@
               <a:pPr>
                 <a:defRPr/>
               </a:pPr>
-              <a:t>5/21/2026</a:t>
+              <a:t>7/25/2026</a:t>
             </a:fld>
             <a:endParaRPr lang="en-US"/>
           </a:p>
@@ -1081,7 +1082,7 @@
               <a:pPr>
                 <a:defRPr/>
               </a:pPr>
-              <a:t>5/21/2026</a:t>
+              <a:t>7/25/2026</a:t>
             </a:fld>
             <a:endParaRPr lang="en-US"/>
           </a:p>
@@ -1273,7 +1274,7 @@
               <a:pPr>
                 <a:defRPr/>
               </a:pPr>
-              <a:t>5/21/2026</a:t>
+              <a:t>7/25/2026</a:t>
             </a:fld>
             <a:endParaRPr lang="en-US"/>
           </a:p>
@@ -1541,7 +1542,7 @@
               <a:pPr>
                 <a:defRPr/>
               </a:pPr>
-              <a:t>5/21/2026</a:t>
+              <a:t>7/25/2026</a:t>
             </a:fld>
             <a:endParaRPr lang="en-US"/>
           </a:p>
@@ -1851,7 +1852,7 @@
               <a:pPr>
                 <a:defRPr/>
               </a:pPr>
-              <a:t>5/21/2026</a:t>
+              <a:t>7/25/2026</a:t>
             </a:fld>
             <a:endParaRPr lang="en-US"/>
           </a:p>
@@ -2295,7 +2296,7 @@
               <a:pPr>
                 <a:defRPr/>
               </a:pPr>
-              <a:t>5/21/2026</a:t>
+              <a:t>7/25/2026</a:t>
             </a:fld>
             <a:endParaRPr lang="en-US"/>
           </a:p>
@@ -2435,7 +2436,7 @@
               <a:pPr>
                 <a:defRPr/>
               </a:pPr>
-              <a:t>5/21/2026</a:t>
+              <a:t>7/25/2026</a:t>
             </a:fld>
             <a:endParaRPr lang="en-US"/>
           </a:p>
@@ -2552,7 +2553,7 @@
               <a:pPr>
                 <a:defRPr/>
               </a:pPr>
-              <a:t>5/21/2026</a:t>
+              <a:t>7/25/2026</a:t>
             </a:fld>
             <a:endParaRPr lang="en-US"/>
           </a:p>
@@ -2851,7 +2852,7 @@
               <a:pPr>
                 <a:defRPr/>
               </a:pPr>
-              <a:t>5/21/2026</a:t>
+              <a:t>7/25/2026</a:t>
             </a:fld>
             <a:endParaRPr lang="en-US"/>
           </a:p>
@@ -3129,7 +3130,7 @@
               <a:pPr>
                 <a:defRPr/>
               </a:pPr>
-              <a:t>5/21/2026</a:t>
+              <a:t>7/25/2026</a:t>
             </a:fld>
             <a:endParaRPr lang="en-US"/>
           </a:p>
@@ -3377,7 +3378,7 @@
               <a:pPr>
                 <a:defRPr/>
               </a:pPr>
-              <a:t>5/21/2026</a:t>
+              <a:t>7/25/2026</a:t>
             </a:fld>
             <a:endParaRPr lang="en-US"/>
           </a:p>
@@ -4374,15 +4375,7 @@
           <a:p>
             <a:r>
               <a:rPr lang="en-US" dirty="0" smtClean="0"/>
-              <a:t>Foundational Models </a:t>
-            </a:r>
-            <a:r>
-              <a:rPr lang="en-US" dirty="0" smtClean="0"/>
-              <a:t>[1</a:t>
-            </a:r>
-            <a:r>
-              <a:rPr lang="en-US" dirty="0" smtClean="0"/>
-              <a:t>]</a:t>
+              <a:t>Foundational Models [1]</a:t>
             </a:r>
             <a:endParaRPr lang="en-US" dirty="0"/>
           </a:p>
@@ -4414,15 +4407,7 @@
                   <a:srgbClr val="C00000"/>
                 </a:solidFill>
               </a:rPr>
-              <a:t>Mixture </a:t>
-            </a:r>
-            <a:r>
-              <a:rPr lang="en-US" sz="2400" i="1" dirty="0" smtClean="0">
-                <a:solidFill>
-                  <a:srgbClr val="C00000"/>
-                </a:solidFill>
-              </a:rPr>
-              <a:t>of experts (</a:t>
+              <a:t>Mixture of experts (</a:t>
             </a:r>
             <a:r>
               <a:rPr lang="en-US" sz="2400" i="1" dirty="0" err="1" smtClean="0">
@@ -4442,15 +4427,7 @@
             </a:r>
             <a:r>
               <a:rPr lang="en-US" sz="2400" dirty="0" smtClean="0"/>
-              <a:t>: an optimization that allows models to have a large number of </a:t>
-            </a:r>
-            <a:r>
-              <a:rPr lang="en-US" sz="2400" dirty="0" smtClean="0"/>
-              <a:t>parameters while </a:t>
-            </a:r>
-            <a:r>
-              <a:rPr lang="en-US" sz="2400" dirty="0" smtClean="0"/>
-              <a:t>activating only a fraction of them for each token.</a:t>
+              <a:t>: an optimization that allows models to have a large number of parameters while activating only a fraction of them for each token.</a:t>
             </a:r>
             <a:endParaRPr lang="en-US" sz="2400" dirty="0">
               <a:solidFill>
@@ -4589,19 +4566,7 @@
             </a:r>
             <a:r>
               <a:rPr lang="en-US" sz="2400" dirty="0" smtClean="0"/>
-              <a:t> from a language model’s final layer </a:t>
-            </a:r>
-            <a:r>
-              <a:rPr lang="en-US" sz="2400" dirty="0" smtClean="0"/>
-              <a:t>before they’re </a:t>
-            </a:r>
-            <a:r>
-              <a:rPr lang="en-US" sz="2400" dirty="0" smtClean="0"/>
-              <a:t>converted into probabilities</a:t>
-            </a:r>
-            <a:r>
-              <a:rPr lang="en-US" sz="2400" dirty="0" smtClean="0"/>
-              <a:t>.</a:t>
+              <a:t> from a language model’s final layer before they’re converted into probabilities.</a:t>
             </a:r>
           </a:p>
           <a:p>
@@ -4611,23 +4576,7 @@
             </a:r>
             <a:r>
               <a:rPr lang="en-US" sz="2400" dirty="0" smtClean="0"/>
-              <a:t> </a:t>
-            </a:r>
-            <a:r>
-              <a:rPr lang="en-US" sz="2400" dirty="0" smtClean="0"/>
-              <a:t>represent the model’s assessment of </a:t>
-            </a:r>
-            <a:r>
-              <a:rPr lang="en-US" sz="2400" dirty="0" smtClean="0"/>
-              <a:t>how likely </a:t>
-            </a:r>
-            <a:r>
-              <a:rPr lang="en-US" sz="2400" dirty="0" smtClean="0"/>
-              <a:t>each token in its vocabulary is to be the next token in a sequence</a:t>
-            </a:r>
-            <a:r>
-              <a:rPr lang="en-US" sz="2400" dirty="0" smtClean="0"/>
-              <a:t>.</a:t>
+              <a:t> represent the model’s assessment of how likely each token in its vocabulary is to be the next token in a sequence.</a:t>
             </a:r>
           </a:p>
           <a:p>
@@ -4649,11 +4598,7 @@
             </a:r>
             <a:r>
               <a:rPr lang="en-US" sz="2400" dirty="0" smtClean="0"/>
-              <a:t> gives you the probability of various </a:t>
-            </a:r>
-            <a:r>
-              <a:rPr lang="en-US" sz="2400" dirty="0" smtClean="0"/>
-              <a:t>continuations.</a:t>
+              <a:t> gives you the probability of various continuations.</a:t>
             </a:r>
             <a:endParaRPr lang="en-US" sz="2400" dirty="0"/>
           </a:p>
@@ -4751,6 +4696,124 @@
 </file>
 
 <file path=ppt/slides/slide8.xml><?xml version="1.0" encoding="utf-8"?>
+<p:sld xmlns:a="http://schemas.openxmlformats.org/drawingml/2006/main" xmlns:r="http://schemas.openxmlformats.org/officeDocument/2006/relationships" xmlns:p="http://schemas.openxmlformats.org/presentationml/2006/main">
+  <p:cSld>
+    <p:spTree>
+      <p:nvGrpSpPr>
+        <p:cNvPr id="1" name=""/>
+        <p:cNvGrpSpPr/>
+        <p:nvPr/>
+      </p:nvGrpSpPr>
+      <p:grpSpPr>
+        <a:xfrm>
+          <a:off x="0" y="0"/>
+          <a:ext cx="0" cy="0"/>
+          <a:chOff x="0" y="0"/>
+          <a:chExt cx="0" cy="0"/>
+        </a:xfrm>
+      </p:grpSpPr>
+      <p:sp>
+        <p:nvSpPr>
+          <p:cNvPr id="2" name="Title 1"/>
+          <p:cNvSpPr>
+            <a:spLocks noGrp="1"/>
+          </p:cNvSpPr>
+          <p:nvPr>
+            <p:ph type="title"/>
+          </p:nvPr>
+        </p:nvSpPr>
+        <p:spPr/>
+        <p:txBody>
+          <a:bodyPr/>
+          <a:lstStyle/>
+          <a:p>
+            <a:r>
+              <a:rPr lang="en-US" dirty="0" smtClean="0"/>
+              <a:t>Agent Harness</a:t>
+            </a:r>
+            <a:endParaRPr lang="en-US" dirty="0"/>
+          </a:p>
+        </p:txBody>
+      </p:sp>
+      <p:sp>
+        <p:nvSpPr>
+          <p:cNvPr id="3" name="Content Placeholder 2"/>
+          <p:cNvSpPr>
+            <a:spLocks noGrp="1"/>
+          </p:cNvSpPr>
+          <p:nvPr>
+            <p:ph idx="1"/>
+          </p:nvPr>
+        </p:nvSpPr>
+        <p:spPr/>
+        <p:txBody>
+          <a:bodyPr/>
+          <a:lstStyle/>
+          <a:p>
+            <a:r>
+              <a:rPr lang="en-US" sz="2400" dirty="0" smtClean="0">
+                <a:hlinkClick r:id="rId2"/>
+              </a:rPr>
+              <a:t>https://devblogs.microsoft.com/agent-framework/the-microsoft-agent-framework-harness-is-now-released</a:t>
+            </a:r>
+            <a:r>
+              <a:rPr lang="en-US" sz="2400" dirty="0" smtClean="0">
+                <a:hlinkClick r:id="rId2"/>
+              </a:rPr>
+              <a:t>/</a:t>
+            </a:r>
+            <a:endParaRPr lang="en-US" sz="2400" dirty="0" smtClean="0"/>
+          </a:p>
+          <a:p>
+            <a:r>
+              <a:rPr lang="en-US" sz="2400" dirty="0" smtClean="0">
+                <a:hlinkClick r:id="rId3"/>
+              </a:rPr>
+              <a:t>https://</a:t>
+            </a:r>
+            <a:r>
+              <a:rPr lang="en-US" sz="2400" dirty="0" smtClean="0">
+                <a:hlinkClick r:id="rId3"/>
+              </a:rPr>
+              <a:t>github.com/microsoft/agent-framework/tree/main/dotnet/samples/02-agents/Harness</a:t>
+            </a:r>
+            <a:endParaRPr lang="en-US" sz="2400" dirty="0" smtClean="0"/>
+          </a:p>
+          <a:p>
+            <a:r>
+              <a:rPr lang="en-US" sz="2400" dirty="0" smtClean="0">
+                <a:hlinkClick r:id="rId4"/>
+              </a:rPr>
+              <a:t>https</a:t>
+            </a:r>
+            <a:r>
+              <a:rPr lang="en-US" sz="2400" smtClean="0">
+                <a:hlinkClick r:id="rId4"/>
+              </a:rPr>
+              <a:t>://</a:t>
+            </a:r>
+            <a:r>
+              <a:rPr lang="en-US" sz="2400" smtClean="0">
+                <a:hlinkClick r:id="rId4"/>
+              </a:rPr>
+              <a:t>github.com/microsoft/agent-framework/tree/main/python/samples/02-agents/harness</a:t>
+            </a:r>
+            <a:endParaRPr lang="en-US" sz="2400" smtClean="0"/>
+          </a:p>
+          <a:p>
+            <a:endParaRPr lang="en-US" sz="2400" dirty="0"/>
+          </a:p>
+        </p:txBody>
+      </p:sp>
+    </p:spTree>
+  </p:cSld>
+  <p:clrMapOvr>
+    <a:masterClrMapping/>
+  </p:clrMapOvr>
+</p:sld>
+</file>
+
+<file path=ppt/slides/slide9.xml><?xml version="1.0" encoding="utf-8"?>
 <p:sld xmlns:a="http://schemas.openxmlformats.org/drawingml/2006/main" xmlns:r="http://schemas.openxmlformats.org/officeDocument/2006/relationships" xmlns:p="http://schemas.openxmlformats.org/presentationml/2006/main">
   <p:cSld>
     <p:spTree>
